--- a/classes/parte-17-profundizacion-para-certificaciones/321-comunicacion-y-reporte-para-analistas-de-seguridad/clase-321-presentacion.pptx
+++ b/classes/parte-17-profundizacion-para-certificaciones/321-comunicacion-y-reporte-para-analistas-de-seguridad/clase-321-presentacion.pptx
@@ -17,6 +17,10 @@
     <p:sldId id="265" r:id="rId16"/>
     <p:sldId id="266" r:id="rId17"/>
     <p:sldId id="267" r:id="rId18"/>
+    <p:sldId id="268" r:id="rId19"/>
+    <p:sldId id="269" r:id="rId20"/>
+    <p:sldId id="270" r:id="rId21"/>
+    <p:sldId id="271" r:id="rId22"/>
   </p:sldIdLst>
   <p:sldSz cx="9144000" cy="6858000" type="screen4x3"/>
   <p:notesSz cx="6858000" cy="9144000"/>
@@ -3198,7 +3202,7 @@
                   <a:srgbClr val="0B3D2E"/>
                 </a:solidFill>
               </a:rPr>
-              <a:t>⚠️ Errores comunes</a:t>
+              <a:t>🧪 Laboratorio guiado — Redactar el paquete de reporte de un incidente</a:t>
             </a:r>
           </a:p>
         </p:txBody>
@@ -3236,82 +3240,97 @@
                   <a:srgbClr val="22282E"/>
                 </a:solidFill>
               </a:rPr>
-              <a:t>•  "La dirección no entendió mi informe" — Escribiste para técnicos. Añade un resumen ejecutivo BLUF sin jerga y traduce el impacto a negocio.</a:t>
-            </a:r>
-          </a:p>
-          <a:p>
-            <a:pPr>
-              <a:spcAft>
-                <a:spcPts val="600"/>
-              </a:spcAft>
-            </a:pPr>
-            <a:r>
-              <a:rPr sz="1500">
-                <a:solidFill>
-                  <a:srgbClr val="22282E"/>
-                </a:solidFill>
-              </a:rPr>
-              <a:t>•  "Reporté 200 vulnerabilidades y no pasó nada" — Sin priorización no hay acción. Entrega un top priorizado con criterio (CVSS+explotación+exposición).</a:t>
-            </a:r>
-          </a:p>
-          <a:p>
-            <a:pPr>
-              <a:spcAft>
-                <a:spcPts val="600"/>
-              </a:spcAft>
-            </a:pPr>
-            <a:r>
-              <a:rPr sz="1500">
-                <a:solidFill>
-                  <a:srgbClr val="22282E"/>
-                </a:solidFill>
-              </a:rPr>
-              <a:t>•  "Durante el incidente todos preguntaban lo mismo" — Falta plan de comunicación. Define quién informa, a quién, cuándo y por qué canal.</a:t>
-            </a:r>
-          </a:p>
-          <a:p>
-            <a:pPr>
-              <a:spcAft>
-                <a:spcPts val="600"/>
-              </a:spcAft>
-            </a:pPr>
-            <a:r>
-              <a:rPr sz="1500">
-                <a:solidFill>
-                  <a:srgbClr val="22282E"/>
-                </a:solidFill>
-              </a:rPr>
-              <a:t>•  "Usamos el correo corporativo y el atacante lo leía" — No usaste canal fuera de banda. Ten un medio alterno predefinido para incidentes.</a:t>
-            </a:r>
-          </a:p>
-          <a:p>
-            <a:pPr>
-              <a:spcAft>
-                <a:spcPts val="600"/>
-              </a:spcAft>
-            </a:pPr>
-            <a:r>
-              <a:rPr sz="1500">
-                <a:solidFill>
-                  <a:srgbClr val="22282E"/>
-                </a:solidFill>
-              </a:rPr>
-              <a:t>•  "Nos pasamos del plazo de notificación" — El reloj corre desde que se conoce la brecha. Evalúa la obligación desde el minuto uno.</a:t>
-            </a:r>
-          </a:p>
-          <a:p>
-            <a:pPr>
-              <a:spcAft>
-                <a:spcPts val="600"/>
-              </a:spcAft>
-            </a:pPr>
-            <a:r>
-              <a:rPr sz="1500">
-                <a:solidFill>
-                  <a:srgbClr val="22282E"/>
-                </a:solidFill>
-              </a:rPr>
-              <a:t>•  "Mis métricas no dicen nada" — Reportas cantidades sin tendencia ni objetivo. Añade umbral, comparación temporal y contexto.</a:t>
+              <a:t>•  Ejercicio aplicado: a partir de un caso, produces el paquete completo de comunicación de un incidente de ransomware contenido.</a:t>
+            </a:r>
+          </a:p>
+          <a:p>
+            <a:pPr>
+              <a:spcAft>
+                <a:spcPts val="600"/>
+              </a:spcAft>
+            </a:pPr>
+            <a:r>
+              <a:rPr sz="1500">
+                <a:solidFill>
+                  <a:srgbClr val="22282E"/>
+                </a:solidFill>
+              </a:rPr>
+              <a:t>•  Toma el caso. Escenario: EDR aísla tres estaciones tras detectar cifrado anómalo; se confirma ransomware en un segmento, sin exfiltración probada, contenido en 4 horas. Datos: activos afectados, hora…</a:t>
+            </a:r>
+          </a:p>
+          <a:p>
+            <a:pPr>
+              <a:spcAft>
+                <a:spcPts val="600"/>
+              </a:spcAft>
+            </a:pPr>
+            <a:r>
+              <a:rPr sz="1500">
+                <a:solidFill>
+                  <a:srgbClr val="22282E"/>
+                </a:solidFill>
+              </a:rPr>
+              <a:t>•  Construye la línea de tiempo. Tabla con hora, evento, actor y evidencia (ID de alerta EDR, hash, host). Es la columna vertebral de todo lo demás.</a:t>
+            </a:r>
+          </a:p>
+          <a:p>
+            <a:pPr>
+              <a:spcAft>
+                <a:spcPts val="600"/>
+              </a:spcAft>
+            </a:pPr>
+            <a:r>
+              <a:rPr sz="1500">
+                <a:solidFill>
+                  <a:srgbClr val="22282E"/>
+                </a:solidFill>
+              </a:rPr>
+              <a:t>•  Escribe el informe técnico. Para el equipo: IOCs, hosts, técnica MITRE ATT&amp;CK observada (p. ej. T1486), acciones de contención y erradicación, y recomendaciones concretas (parches, segmentación…</a:t>
+            </a:r>
+          </a:p>
+          <a:p>
+            <a:pPr>
+              <a:spcAft>
+                <a:spcPts val="600"/>
+              </a:spcAft>
+            </a:pPr>
+            <a:r>
+              <a:rPr sz="1500">
+                <a:solidFill>
+                  <a:srgbClr val="22282E"/>
+                </a:solidFill>
+              </a:rPr>
+              <a:t>•  Redacta el resumen ejecutivo (BLUF). Media página, sin jerga: qué ocurrió, impacto en el negocio (tres equipos parados 4 h, sin fuga confirmada), decisiones requeridas (aprobar reinstalación, revisar…</a:t>
+            </a:r>
+          </a:p>
+          <a:p>
+            <a:pPr>
+              <a:spcAft>
+                <a:spcPts val="600"/>
+              </a:spcAft>
+            </a:pPr>
+            <a:r>
+              <a:rPr sz="1500">
+                <a:solidFill>
+                  <a:srgbClr val="22282E"/>
+                </a:solidFill>
+              </a:rPr>
+              <a:t>•  Prepara el brief de gestión. Nivel intermedio: riesgo residual, coste estimado de recuperación, SLA de vuelta a operación, y qué recursos se necesitan.</a:t>
+            </a:r>
+          </a:p>
+          <a:p>
+            <a:pPr>
+              <a:spcAft>
+                <a:spcPts val="600"/>
+              </a:spcAft>
+            </a:pPr>
+            <a:r>
+              <a:rPr sz="1500">
+                <a:solidFill>
+                  <a:srgbClr val="22282E"/>
+                </a:solidFill>
+              </a:rPr>
+              <a:t>•  Define el plan de comunicación. Matriz de escalado: quién se entera a los 15 min, a la hora, y al cierre; canal primario y fuera de banda; qué se dice y qué no se dice mientras la investigación sigue…</a:t>
             </a:r>
           </a:p>
         </p:txBody>
@@ -3362,7 +3381,7 @@
                   <a:srgbClr val="0B3D2E"/>
                 </a:solidFill>
               </a:rPr>
-              <a:t>❓ Preguntas frecuentes</a:t>
+              <a:t>✍️ Ejercicios</a:t>
             </a:r>
           </a:p>
         </p:txBody>
@@ -3400,97 +3419,82 @@
                   <a:srgbClr val="22282E"/>
                 </a:solidFill>
               </a:rPr>
-              <a:t>•  ❓ ¿Qué va y qué no va en un resumen ejecutivo?</a:t>
-            </a:r>
-          </a:p>
-          <a:p>
-            <a:pPr>
-              <a:spcAft>
-                <a:spcPts val="600"/>
-              </a:spcAft>
-            </a:pPr>
-            <a:r>
-              <a:rPr sz="1500">
-                <a:solidFill>
-                  <a:srgbClr val="22282E"/>
-                </a:solidFill>
-              </a:rPr>
-              <a:t>•  Va: qué pasó, impacto en el negocio, estado actual y qué se pide decidir. No va: comandos, CVE crudos, nombres de herramientas ni detalle forense. Si un directivo no técnico no lo entiende en 60 segundos, reescríbelo.</a:t>
-            </a:r>
-          </a:p>
-          <a:p>
-            <a:pPr>
-              <a:spcAft>
-                <a:spcPts val="600"/>
-              </a:spcAft>
-            </a:pPr>
-            <a:r>
-              <a:rPr sz="1500">
-                <a:solidFill>
-                  <a:srgbClr val="22282E"/>
-                </a:solidFill>
-              </a:rPr>
-              <a:t>•  ❓ ¿Debo notificar siempre una brecha a los clientes o al regulador?</a:t>
-            </a:r>
-          </a:p>
-          <a:p>
-            <a:pPr>
-              <a:spcAft>
-                <a:spcPts val="600"/>
-              </a:spcAft>
-            </a:pPr>
-            <a:r>
-              <a:rPr sz="1500">
-                <a:solidFill>
-                  <a:srgbClr val="22282E"/>
-                </a:solidFill>
-              </a:rPr>
-              <a:t>•  Depende del tipo de dato, jurisdicción y umbral de riesgo. Muchas leyes (GDPR) exigen notificar a la autoridad en 72 h si hay riesgo para las personas. Documenta siempre la decisión y su base legal, incluso cuando decidas que no aplica.</a:t>
-            </a:r>
-          </a:p>
-          <a:p>
-            <a:pPr>
-              <a:spcAft>
-                <a:spcPts val="600"/>
-              </a:spcAft>
-            </a:pPr>
-            <a:r>
-              <a:rPr sz="1500">
-                <a:solidFill>
-                  <a:srgbClr val="22282E"/>
-                </a:solidFill>
-              </a:rPr>
-              <a:t>•  ❓ ¿Cuáles son las métricas mínimas de un SOC?</a:t>
-            </a:r>
-          </a:p>
-          <a:p>
-            <a:pPr>
-              <a:spcAft>
-                <a:spcPts val="600"/>
-              </a:spcAft>
-            </a:pPr>
-            <a:r>
-              <a:rPr sz="1500">
-                <a:solidFill>
-                  <a:srgbClr val="22282E"/>
-                </a:solidFill>
-              </a:rPr>
-              <a:t>•  MTTD, MTTR, cobertura de detección, backlog de vulnerabilidades/alertas y tasa de falsos positivos. Reportadas con objetivo y tendencia, no como número suelto.</a:t>
-            </a:r>
-          </a:p>
-          <a:p>
-            <a:pPr>
-              <a:spcAft>
-                <a:spcPts val="600"/>
-              </a:spcAft>
-            </a:pPr>
-            <a:r>
-              <a:rPr sz="1500">
-                <a:solidFill>
-                  <a:srgbClr val="22282E"/>
-                </a:solidFill>
-              </a:rPr>
-              <a:t>•  ❓ ¿Por qué separar comunicación técnica y ejecutiva si es el mismo incidente?</a:t>
+              <a:t>•  Reescribe un hallazgo técnico ("SMBv1 habilitado en 40 hosts, CVE-2017-0144") en una frase para dirección ejecutiva.</a:t>
+            </a:r>
+          </a:p>
+          <a:p>
+            <a:pPr>
+              <a:spcAft>
+                <a:spcPts val="600"/>
+              </a:spcAft>
+            </a:pPr>
+            <a:r>
+              <a:rPr sz="1500">
+                <a:solidFill>
+                  <a:srgbClr val="22282E"/>
+                </a:solidFill>
+              </a:rPr>
+              <a:t>•  Redacta un resumen ejecutivo (máx. 150 palabras) para el incidente del laboratorio.</a:t>
+            </a:r>
+          </a:p>
+          <a:p>
+            <a:pPr>
+              <a:spcAft>
+                <a:spcPts val="600"/>
+              </a:spcAft>
+            </a:pPr>
+            <a:r>
+              <a:rPr sz="1500">
+                <a:solidFill>
+                  <a:srgbClr val="22282E"/>
+                </a:solidFill>
+              </a:rPr>
+              <a:t>•  Diseña la matriz de escalado de tu organización (roles, canal primario, canal fuera de banda, umbral de tiempo).</a:t>
+            </a:r>
+          </a:p>
+          <a:p>
+            <a:pPr>
+              <a:spcAft>
+                <a:spcPts val="600"/>
+              </a:spcAft>
+            </a:pPr>
+            <a:r>
+              <a:rPr sz="1500">
+                <a:solidFill>
+                  <a:srgbClr val="22282E"/>
+                </a:solidFill>
+              </a:rPr>
+              <a:t>•  Define cinco KPIs de SOC con umbral y frecuencia, y justifica por qué cada uno importa a la dirección.</a:t>
+            </a:r>
+          </a:p>
+          <a:p>
+            <a:pPr>
+              <a:spcAft>
+                <a:spcPts val="600"/>
+              </a:spcAft>
+            </a:pPr>
+            <a:r>
+              <a:rPr sz="1500">
+                <a:solidFill>
+                  <a:srgbClr val="22282E"/>
+                </a:solidFill>
+              </a:rPr>
+              <a:t>•  Construye un árbol de decisión de notificación (interna → clientes → reguladores → fuerzas del orden) con los disparadores de cada rama.</a:t>
+            </a:r>
+          </a:p>
+          <a:p>
+            <a:pPr>
+              <a:spcAft>
+                <a:spcPts val="600"/>
+              </a:spcAft>
+            </a:pPr>
+            <a:r>
+              <a:rPr sz="1500">
+                <a:solidFill>
+                  <a:srgbClr val="22282E"/>
+                </a:solidFill>
+              </a:rPr>
+              <a:t>•  Convierte un informe de vulnerabilidades de 20 hallazgos en un cuadro priorizado de "top 5 a remediar esta semana" con criterio explícito.</a:t>
             </a:r>
           </a:p>
         </p:txBody>
@@ -3541,7 +3545,7 @@
                   <a:srgbClr val="0B3D2E"/>
                 </a:solidFill>
               </a:rPr>
-              <a:t>🔗 Referencias</a:t>
+              <a:t>📝 Reto verificable</a:t>
             </a:r>
           </a:p>
         </p:txBody>
@@ -3579,6 +3583,528 @@
                   <a:srgbClr val="22282E"/>
                 </a:solidFill>
               </a:rPr>
+              <a:t>•  Reto: entrega el paquete de comunicación completo del incidente del laboratorio, apto para presentarlo en una reunión de crisis.</a:t>
+            </a:r>
+          </a:p>
+          <a:p>
+            <a:pPr>
+              <a:spcAft>
+                <a:spcPts val="600"/>
+              </a:spcAft>
+            </a:pPr>
+            <a:r>
+              <a:rPr sz="1500">
+                <a:solidFill>
+                  <a:srgbClr val="22282E"/>
+                </a:solidFill>
+              </a:rPr>
+              <a:t>•  Criterio de aceptación:</a:t>
+            </a:r>
+          </a:p>
+          <a:p>
+            <a:pPr>
+              <a:spcAft>
+                <a:spcPts val="600"/>
+              </a:spcAft>
+            </a:pPr>
+            <a:r>
+              <a:rPr sz="1500">
+                <a:solidFill>
+                  <a:srgbClr val="22282E"/>
+                </a:solidFill>
+              </a:rPr>
+              <a:t>•  El resumen ejecutivo ocupa ≤ 1 página, no contiene jerga técnica ni CVE crudos y termina con las decisiones requeridas.</a:t>
+            </a:r>
+          </a:p>
+          <a:p>
+            <a:pPr>
+              <a:spcAft>
+                <a:spcPts val="600"/>
+              </a:spcAft>
+            </a:pPr>
+            <a:r>
+              <a:rPr sz="1500">
+                <a:solidFill>
+                  <a:srgbClr val="22282E"/>
+                </a:solidFill>
+              </a:rPr>
+              <a:t>•  El informe técnico incluye línea de tiempo con evidencia verificable, técnica MITRE ATT&amp;CK y recomendaciones accionables con dueño.</a:t>
+            </a:r>
+          </a:p>
+          <a:p>
+            <a:pPr>
+              <a:spcAft>
+                <a:spcPts val="600"/>
+              </a:spcAft>
+            </a:pPr>
+            <a:r>
+              <a:rPr sz="1500">
+                <a:solidFill>
+                  <a:srgbClr val="22282E"/>
+                </a:solidFill>
+              </a:rPr>
+              <a:t>•  Existe una matriz de escalado con canal fuera de banda y umbrales de tiempo por rol.</a:t>
+            </a:r>
+          </a:p>
+          <a:p>
+            <a:pPr>
+              <a:spcAft>
+                <a:spcPts val="600"/>
+              </a:spcAft>
+            </a:pPr>
+            <a:r>
+              <a:rPr sz="1500">
+                <a:solidFill>
+                  <a:srgbClr val="22282E"/>
+                </a:solidFill>
+              </a:rPr>
+              <a:t>•  La decisión de notificación está documentada con su base legal y marca temporal (aunque la conclusión sea "no aplica").</a:t>
+            </a:r>
+          </a:p>
+          <a:p>
+            <a:pPr>
+              <a:spcAft>
+                <a:spcPts val="600"/>
+              </a:spcAft>
+            </a:pPr>
+            <a:r>
+              <a:rPr sz="1500">
+                <a:solidFill>
+                  <a:srgbClr val="22282E"/>
+                </a:solidFill>
+              </a:rPr>
+              <a:t>•  Se reportan MTTD y MTTR comparados con el objetivo y al menos tres lecciones aprendidas con dueño y fecha.</a:t>
+            </a:r>
+          </a:p>
+        </p:txBody>
+      </p:sp>
+    </p:spTree>
+  </p:cSld>
+  <p:clrMapOvr>
+    <a:masterClrMapping/>
+  </p:clrMapOvr>
+</p:sld>
+</file>
+
+<file path=ppt/slides/slide13.xml><?xml version="1.0" encoding="utf-8"?>
+<p:sld xmlns:a="http://schemas.openxmlformats.org/drawingml/2006/main" xmlns:p="http://schemas.openxmlformats.org/presentationml/2006/main" xmlns:r="http://schemas.openxmlformats.org/officeDocument/2006/relationships">
+  <p:cSld>
+    <p:spTree>
+      <p:nvGrpSpPr>
+        <p:cNvPr id="1" name=""/>
+        <p:cNvGrpSpPr/>
+        <p:nvPr/>
+      </p:nvGrpSpPr>
+      <p:grpSpPr/>
+      <p:sp>
+        <p:nvSpPr>
+          <p:cNvPr id="2" name="TextBox 1"/>
+          <p:cNvSpPr txBox="1"/>
+          <p:nvPr/>
+        </p:nvSpPr>
+        <p:spPr>
+          <a:xfrm>
+            <a:off x="457200" y="320040"/>
+            <a:ext cx="8229600" cy="822960"/>
+          </a:xfrm>
+          <a:prstGeom prst="rect">
+            <a:avLst/>
+          </a:prstGeom>
+          <a:noFill/>
+        </p:spPr>
+        <p:txBody>
+          <a:bodyPr wrap="square">
+            <a:spAutoFit/>
+          </a:bodyPr>
+          <a:lstStyle/>
+          <a:p>
+            <a:r>
+              <a:rPr sz="2600" b="1">
+                <a:solidFill>
+                  <a:srgbClr val="0B3D2E"/>
+                </a:solidFill>
+              </a:rPr>
+              <a:t>⚠️ Errores comunes</a:t>
+            </a:r>
+          </a:p>
+        </p:txBody>
+      </p:sp>
+      <p:sp>
+        <p:nvSpPr>
+          <p:cNvPr id="3" name="TextBox 2"/>
+          <p:cNvSpPr txBox="1"/>
+          <p:nvPr/>
+        </p:nvSpPr>
+        <p:spPr>
+          <a:xfrm>
+            <a:off x="457200" y="1280160"/>
+            <a:ext cx="8229600" cy="4937760"/>
+          </a:xfrm>
+          <a:prstGeom prst="rect">
+            <a:avLst/>
+          </a:prstGeom>
+          <a:noFill/>
+        </p:spPr>
+        <p:txBody>
+          <a:bodyPr wrap="square">
+            <a:spAutoFit/>
+          </a:bodyPr>
+          <a:lstStyle/>
+          <a:p>
+            <a:pPr>
+              <a:spcAft>
+                <a:spcPts val="600"/>
+              </a:spcAft>
+            </a:pPr>
+            <a:r>
+              <a:rPr sz="1500">
+                <a:solidFill>
+                  <a:srgbClr val="22282E"/>
+                </a:solidFill>
+              </a:rPr>
+              <a:t>•  "La dirección no entendió mi informe" — Escribiste para técnicos. Añade un resumen ejecutivo BLUF sin jerga y traduce el impacto a negocio.</a:t>
+            </a:r>
+          </a:p>
+          <a:p>
+            <a:pPr>
+              <a:spcAft>
+                <a:spcPts val="600"/>
+              </a:spcAft>
+            </a:pPr>
+            <a:r>
+              <a:rPr sz="1500">
+                <a:solidFill>
+                  <a:srgbClr val="22282E"/>
+                </a:solidFill>
+              </a:rPr>
+              <a:t>•  "Reporté 200 vulnerabilidades y no pasó nada" — Sin priorización no hay acción. Entrega un top priorizado con criterio (CVSS+explotación+exposición).</a:t>
+            </a:r>
+          </a:p>
+          <a:p>
+            <a:pPr>
+              <a:spcAft>
+                <a:spcPts val="600"/>
+              </a:spcAft>
+            </a:pPr>
+            <a:r>
+              <a:rPr sz="1500">
+                <a:solidFill>
+                  <a:srgbClr val="22282E"/>
+                </a:solidFill>
+              </a:rPr>
+              <a:t>•  "Durante el incidente todos preguntaban lo mismo" — Falta plan de comunicación. Define quién informa, a quién, cuándo y por qué canal.</a:t>
+            </a:r>
+          </a:p>
+          <a:p>
+            <a:pPr>
+              <a:spcAft>
+                <a:spcPts val="600"/>
+              </a:spcAft>
+            </a:pPr>
+            <a:r>
+              <a:rPr sz="1500">
+                <a:solidFill>
+                  <a:srgbClr val="22282E"/>
+                </a:solidFill>
+              </a:rPr>
+              <a:t>•  "Usamos el correo corporativo y el atacante lo leía" — No usaste canal fuera de banda. Ten un medio alterno predefinido para incidentes.</a:t>
+            </a:r>
+          </a:p>
+          <a:p>
+            <a:pPr>
+              <a:spcAft>
+                <a:spcPts val="600"/>
+              </a:spcAft>
+            </a:pPr>
+            <a:r>
+              <a:rPr sz="1500">
+                <a:solidFill>
+                  <a:srgbClr val="22282E"/>
+                </a:solidFill>
+              </a:rPr>
+              <a:t>•  "Nos pasamos del plazo de notificación" — El reloj corre desde que se conoce la brecha. Evalúa la obligación desde el minuto uno.</a:t>
+            </a:r>
+          </a:p>
+          <a:p>
+            <a:pPr>
+              <a:spcAft>
+                <a:spcPts val="600"/>
+              </a:spcAft>
+            </a:pPr>
+            <a:r>
+              <a:rPr sz="1500">
+                <a:solidFill>
+                  <a:srgbClr val="22282E"/>
+                </a:solidFill>
+              </a:rPr>
+              <a:t>•  "Mis métricas no dicen nada" — Reportas cantidades sin tendencia ni objetivo. Añade umbral, comparación temporal y contexto.</a:t>
+            </a:r>
+          </a:p>
+        </p:txBody>
+      </p:sp>
+    </p:spTree>
+  </p:cSld>
+  <p:clrMapOvr>
+    <a:masterClrMapping/>
+  </p:clrMapOvr>
+</p:sld>
+</file>
+
+<file path=ppt/slides/slide14.xml><?xml version="1.0" encoding="utf-8"?>
+<p:sld xmlns:a="http://schemas.openxmlformats.org/drawingml/2006/main" xmlns:p="http://schemas.openxmlformats.org/presentationml/2006/main" xmlns:r="http://schemas.openxmlformats.org/officeDocument/2006/relationships">
+  <p:cSld>
+    <p:spTree>
+      <p:nvGrpSpPr>
+        <p:cNvPr id="1" name=""/>
+        <p:cNvGrpSpPr/>
+        <p:nvPr/>
+      </p:nvGrpSpPr>
+      <p:grpSpPr/>
+      <p:sp>
+        <p:nvSpPr>
+          <p:cNvPr id="2" name="TextBox 1"/>
+          <p:cNvSpPr txBox="1"/>
+          <p:nvPr/>
+        </p:nvSpPr>
+        <p:spPr>
+          <a:xfrm>
+            <a:off x="457200" y="320040"/>
+            <a:ext cx="8229600" cy="822960"/>
+          </a:xfrm>
+          <a:prstGeom prst="rect">
+            <a:avLst/>
+          </a:prstGeom>
+          <a:noFill/>
+        </p:spPr>
+        <p:txBody>
+          <a:bodyPr wrap="square">
+            <a:spAutoFit/>
+          </a:bodyPr>
+          <a:lstStyle/>
+          <a:p>
+            <a:r>
+              <a:rPr sz="2600" b="1">
+                <a:solidFill>
+                  <a:srgbClr val="0B3D2E"/>
+                </a:solidFill>
+              </a:rPr>
+              <a:t>❓ Preguntas frecuentes</a:t>
+            </a:r>
+          </a:p>
+        </p:txBody>
+      </p:sp>
+      <p:sp>
+        <p:nvSpPr>
+          <p:cNvPr id="3" name="TextBox 2"/>
+          <p:cNvSpPr txBox="1"/>
+          <p:nvPr/>
+        </p:nvSpPr>
+        <p:spPr>
+          <a:xfrm>
+            <a:off x="457200" y="1280160"/>
+            <a:ext cx="8229600" cy="4937760"/>
+          </a:xfrm>
+          <a:prstGeom prst="rect">
+            <a:avLst/>
+          </a:prstGeom>
+          <a:noFill/>
+        </p:spPr>
+        <p:txBody>
+          <a:bodyPr wrap="square">
+            <a:spAutoFit/>
+          </a:bodyPr>
+          <a:lstStyle/>
+          <a:p>
+            <a:pPr>
+              <a:spcAft>
+                <a:spcPts val="600"/>
+              </a:spcAft>
+            </a:pPr>
+            <a:r>
+              <a:rPr sz="1500">
+                <a:solidFill>
+                  <a:srgbClr val="22282E"/>
+                </a:solidFill>
+              </a:rPr>
+              <a:t>•  ❓ ¿Qué va y qué no va en un resumen ejecutivo?</a:t>
+            </a:r>
+          </a:p>
+          <a:p>
+            <a:pPr>
+              <a:spcAft>
+                <a:spcPts val="600"/>
+              </a:spcAft>
+            </a:pPr>
+            <a:r>
+              <a:rPr sz="1500">
+                <a:solidFill>
+                  <a:srgbClr val="22282E"/>
+                </a:solidFill>
+              </a:rPr>
+              <a:t>•  Va: qué pasó, impacto en el negocio, estado actual y qué se pide decidir. No va: comandos, CVE crudos, nombres de herramientas ni detalle forense. Si un directivo no técnico no lo entiende en 60…</a:t>
+            </a:r>
+          </a:p>
+          <a:p>
+            <a:pPr>
+              <a:spcAft>
+                <a:spcPts val="600"/>
+              </a:spcAft>
+            </a:pPr>
+            <a:r>
+              <a:rPr sz="1500">
+                <a:solidFill>
+                  <a:srgbClr val="22282E"/>
+                </a:solidFill>
+              </a:rPr>
+              <a:t>•  ❓ ¿Debo notificar siempre una brecha a los clientes o al regulador?</a:t>
+            </a:r>
+          </a:p>
+          <a:p>
+            <a:pPr>
+              <a:spcAft>
+                <a:spcPts val="600"/>
+              </a:spcAft>
+            </a:pPr>
+            <a:r>
+              <a:rPr sz="1500">
+                <a:solidFill>
+                  <a:srgbClr val="22282E"/>
+                </a:solidFill>
+              </a:rPr>
+              <a:t>•  Depende del tipo de dato, jurisdicción y umbral de riesgo. Muchas leyes (GDPR) exigen notificar a la autoridad en 72 h si hay riesgo para las personas. Documenta siempre la decisión y su base legal…</a:t>
+            </a:r>
+          </a:p>
+          <a:p>
+            <a:pPr>
+              <a:spcAft>
+                <a:spcPts val="600"/>
+              </a:spcAft>
+            </a:pPr>
+            <a:r>
+              <a:rPr sz="1500">
+                <a:solidFill>
+                  <a:srgbClr val="22282E"/>
+                </a:solidFill>
+              </a:rPr>
+              <a:t>•  ❓ ¿Cuáles son las métricas mínimas de un SOC?</a:t>
+            </a:r>
+          </a:p>
+          <a:p>
+            <a:pPr>
+              <a:spcAft>
+                <a:spcPts val="600"/>
+              </a:spcAft>
+            </a:pPr>
+            <a:r>
+              <a:rPr sz="1500">
+                <a:solidFill>
+                  <a:srgbClr val="22282E"/>
+                </a:solidFill>
+              </a:rPr>
+              <a:t>•  MTTD, MTTR, cobertura de detección, backlog de vulnerabilidades/alertas y tasa de falsos positivos. Reportadas con objetivo y tendencia, no como número suelto.</a:t>
+            </a:r>
+          </a:p>
+          <a:p>
+            <a:pPr>
+              <a:spcAft>
+                <a:spcPts val="600"/>
+              </a:spcAft>
+            </a:pPr>
+            <a:r>
+              <a:rPr sz="1500">
+                <a:solidFill>
+                  <a:srgbClr val="22282E"/>
+                </a:solidFill>
+              </a:rPr>
+              <a:t>•  ❓ ¿Por qué separar comunicación técnica y ejecutiva si es el mismo incidente?</a:t>
+            </a:r>
+          </a:p>
+        </p:txBody>
+      </p:sp>
+    </p:spTree>
+  </p:cSld>
+  <p:clrMapOvr>
+    <a:masterClrMapping/>
+  </p:clrMapOvr>
+</p:sld>
+</file>
+
+<file path=ppt/slides/slide15.xml><?xml version="1.0" encoding="utf-8"?>
+<p:sld xmlns:a="http://schemas.openxmlformats.org/drawingml/2006/main" xmlns:p="http://schemas.openxmlformats.org/presentationml/2006/main" xmlns:r="http://schemas.openxmlformats.org/officeDocument/2006/relationships">
+  <p:cSld>
+    <p:spTree>
+      <p:nvGrpSpPr>
+        <p:cNvPr id="1" name=""/>
+        <p:cNvGrpSpPr/>
+        <p:nvPr/>
+      </p:nvGrpSpPr>
+      <p:grpSpPr/>
+      <p:sp>
+        <p:nvSpPr>
+          <p:cNvPr id="2" name="TextBox 1"/>
+          <p:cNvSpPr txBox="1"/>
+          <p:nvPr/>
+        </p:nvSpPr>
+        <p:spPr>
+          <a:xfrm>
+            <a:off x="457200" y="320040"/>
+            <a:ext cx="8229600" cy="822960"/>
+          </a:xfrm>
+          <a:prstGeom prst="rect">
+            <a:avLst/>
+          </a:prstGeom>
+          <a:noFill/>
+        </p:spPr>
+        <p:txBody>
+          <a:bodyPr wrap="square">
+            <a:spAutoFit/>
+          </a:bodyPr>
+          <a:lstStyle/>
+          <a:p>
+            <a:r>
+              <a:rPr sz="2600" b="1">
+                <a:solidFill>
+                  <a:srgbClr val="0B3D2E"/>
+                </a:solidFill>
+              </a:rPr>
+              <a:t>🔗 Referencias</a:t>
+            </a:r>
+          </a:p>
+        </p:txBody>
+      </p:sp>
+      <p:sp>
+        <p:nvSpPr>
+          <p:cNvPr id="3" name="TextBox 2"/>
+          <p:cNvSpPr txBox="1"/>
+          <p:nvPr/>
+        </p:nvSpPr>
+        <p:spPr>
+          <a:xfrm>
+            <a:off x="457200" y="1280160"/>
+            <a:ext cx="8229600" cy="4937760"/>
+          </a:xfrm>
+          <a:prstGeom prst="rect">
+            <a:avLst/>
+          </a:prstGeom>
+          <a:noFill/>
+        </p:spPr>
+        <p:txBody>
+          <a:bodyPr wrap="square">
+            <a:spAutoFit/>
+          </a:bodyPr>
+          <a:lstStyle/>
+          <a:p>
+            <a:pPr>
+              <a:spcAft>
+                <a:spcPts val="600"/>
+              </a:spcAft>
+            </a:pPr>
+            <a:r>
+              <a:rPr sz="1500">
+                <a:solidFill>
+                  <a:srgbClr val="22282E"/>
+                </a:solidFill>
+              </a:rPr>
               <a:t>•  CompTIA. CySA+ (CS0-003) Exam Objectives — dominio Reporting and Communication.</a:t>
             </a:r>
           </a:p>
@@ -3644,6 +4170,81 @@
           </a:p>
         </p:txBody>
       </p:sp>
+    </p:spTree>
+  </p:cSld>
+  <p:clrMapOvr>
+    <a:masterClrMapping/>
+  </p:clrMapOvr>
+</p:sld>
+</file>
+
+<file path=ppt/slides/slide16.xml><?xml version="1.0" encoding="utf-8"?>
+<p:sld xmlns:a="http://schemas.openxmlformats.org/drawingml/2006/main" xmlns:p="http://schemas.openxmlformats.org/presentationml/2006/main" xmlns:r="http://schemas.openxmlformats.org/officeDocument/2006/relationships">
+  <p:cSld>
+    <p:spTree>
+      <p:nvGrpSpPr>
+        <p:cNvPr id="1" name=""/>
+        <p:cNvGrpSpPr/>
+        <p:nvPr/>
+      </p:nvGrpSpPr>
+      <p:grpSpPr/>
+      <p:sp>
+        <p:nvSpPr>
+          <p:cNvPr id="2" name="TextBox 1"/>
+          <p:cNvSpPr txBox="1"/>
+          <p:nvPr/>
+        </p:nvSpPr>
+        <p:spPr>
+          <a:xfrm>
+            <a:off x="457200" y="274320"/>
+            <a:ext cx="8229600" cy="640080"/>
+          </a:xfrm>
+          <a:prstGeom prst="rect">
+            <a:avLst/>
+          </a:prstGeom>
+          <a:noFill/>
+        </p:spPr>
+        <p:txBody>
+          <a:bodyPr wrap="square">
+            <a:spAutoFit/>
+          </a:bodyPr>
+          <a:lstStyle/>
+          <a:p>
+            <a:r>
+              <a:rPr sz="2200" b="1">
+                <a:solidFill>
+                  <a:srgbClr val="0B3D2E"/>
+                </a:solidFill>
+              </a:rPr>
+              <a:t>Diagrama de la clase</a:t>
+            </a:r>
+          </a:p>
+        </p:txBody>
+      </p:sp>
+      <p:pic>
+        <p:nvPicPr>
+          <p:cNvPr id="3" name="Picture 2" descr="f06e9da1fa3c0c7b.png"/>
+          <p:cNvPicPr>
+            <a:picLocks noChangeAspect="1"/>
+          </p:cNvPicPr>
+          <p:nvPr/>
+        </p:nvPicPr>
+        <p:blipFill>
+          <a:blip r:embed="rId2"/>
+          <a:stretch>
+            <a:fillRect/>
+          </a:stretch>
+        </p:blipFill>
+        <p:spPr>
+          <a:xfrm>
+            <a:off x="457200" y="3306588"/>
+            <a:ext cx="8229600" cy="884903"/>
+          </a:xfrm>
+          <a:prstGeom prst="rect">
+            <a:avLst/>
+          </a:prstGeom>
+        </p:spPr>
+      </p:pic>
     </p:spTree>
   </p:cSld>
   <p:clrMapOvr>
@@ -3728,7 +4329,7 @@
                   <a:srgbClr val="22282E"/>
                 </a:solidFill>
               </a:rPr>
-              <a:t>•  Un hallazgo que nadie entiende no se remedia. Esta clase enseña a comunicar y reportar como analista de seguridad: escribir informes de vulnerabilidades e incidentes claros, adaptar el mensaje a la audiencia (técnica, gestión, ejecutiva, legal), definir métricas y KPIs que importan, y comunicar durante un incidente sin generar pánico ni filtrar información sensible. Es el dominio de Reporting and Communication de CySA+ (el de mayor peso conceptual en el examen) y una habilidad que define la carrera de un analista tanto como su capacidad técnica.</a:t>
+              <a:t>•  Un hallazgo que nadie entiende no se remedia. Esta clase enseña a comunicar y reportar como analista de seguridad: escribir informes de vulnerabilidades e incidentes claros, adaptar el mensaje a la…</a:t>
             </a:r>
           </a:p>
         </p:txBody>
@@ -4122,7 +4723,7 @@
                   <a:srgbClr val="0B3D2E"/>
                 </a:solidFill>
               </a:rPr>
-              <a:t>📖 Definiciones y características</a:t>
+              <a:t>🧠 Modelo mental y caso de decisión</a:t>
             </a:r>
           </a:p>
         </p:txBody>
@@ -4160,97 +4761,22 @@
                   <a:srgbClr val="22282E"/>
                 </a:solidFill>
               </a:rPr>
-              <a:t>•  BLUF (Bottom Line Up Front): técnica de redacción que pone la conclusión y la acción requerida al principio. Característica clave: respeta el tiempo del lector ejecutivo, que decide antes de leer el detalle.</a:t>
-            </a:r>
-          </a:p>
-          <a:p>
-            <a:pPr>
-              <a:spcAft>
-                <a:spcPts val="600"/>
-              </a:spcAft>
-            </a:pPr>
-            <a:r>
-              <a:rPr sz="1500">
-                <a:solidFill>
-                  <a:srgbClr val="22282E"/>
-                </a:solidFill>
-              </a:rPr>
-              <a:t>•  Resumen ejecutivo: media página sin jerga que responde qué pasó, qué impacto tiene en el negocio y qué se pide decidir. Característica clave: se escribe al final pero se lee primero; no contiene comandos ni CVE crudos.</a:t>
-            </a:r>
-          </a:p>
-          <a:p>
-            <a:pPr>
-              <a:spcAft>
-                <a:spcPts val="600"/>
-              </a:spcAft>
-            </a:pPr>
-            <a:r>
-              <a:rPr sz="1500">
-                <a:solidFill>
-                  <a:srgbClr val="22282E"/>
-                </a:solidFill>
-              </a:rPr>
-              <a:t>•  MTTD / MTTR: Mean Time To Detect (tiempo medio hasta detectar) y Mean Time To Respond/Remediate (hasta responder/remediar). Característica clave: miden la eficacia operativa del SOC y son los KPIs que la dirección entiende.</a:t>
-            </a:r>
-          </a:p>
-          <a:p>
-            <a:pPr>
-              <a:spcAft>
-                <a:spcPts val="600"/>
-              </a:spcAft>
-            </a:pPr>
-            <a:r>
-              <a:rPr sz="1500">
-                <a:solidFill>
-                  <a:srgbClr val="22282E"/>
-                </a:solidFill>
-              </a:rPr>
-              <a:t>•  KPI vs KRI: un KPI mide desempeño pasado (% de activos escaneados); un KRI anticipa riesgo (nº de sistemas críticos sin parchear &gt; SLA). Característica clave: se reportan juntos para dar foto y tendencia.</a:t>
-            </a:r>
-          </a:p>
-          <a:p>
-            <a:pPr>
-              <a:spcAft>
-                <a:spcPts val="600"/>
-              </a:spcAft>
-            </a:pPr>
-            <a:r>
-              <a:rPr sz="1500">
-                <a:solidFill>
-                  <a:srgbClr val="22282E"/>
-                </a:solidFill>
-              </a:rPr>
-              <a:t>•  Stakeholder / audiencia: grupo con interés en el reporte —analistas, dueños de sistema, gestión, dirección, legal, comunicación, reguladores. Característica clave: cada uno necesita distinto nivel de detalle y distinto vocabulario.</a:t>
-            </a:r>
-          </a:p>
-          <a:p>
-            <a:pPr>
-              <a:spcAft>
-                <a:spcPts val="600"/>
-              </a:spcAft>
-            </a:pPr>
-            <a:r>
-              <a:rPr sz="1500">
-                <a:solidFill>
-                  <a:srgbClr val="22282E"/>
-                </a:solidFill>
-              </a:rPr>
-              <a:t>•  Canal fuera de banda (out-of-band): medio de comunicación alterno (teléfono, Signal, sala física) usado durante un incidente por si el atacante controla el correo/chat corporativo. Característica clave: evita alertar al adversario y mantener la coordinación aunque el entorno esté comprometido.</a:t>
-            </a:r>
-          </a:p>
-          <a:p>
-            <a:pPr>
-              <a:spcAft>
-                <a:spcPts val="600"/>
-              </a:spcAft>
-            </a:pPr>
-            <a:r>
-              <a:rPr sz="1500">
-                <a:solidFill>
-                  <a:srgbClr val="22282E"/>
-                </a:solidFill>
-              </a:rPr>
-              <a:t>•  Ventana de notificación: plazo legal para notificar una brecha (p. ej. 72 horas a la autoridad bajo GDPR). Característica clave: corre desde que se conoce la brecha, no desde que se resuelve.</a:t>
+              <a:t>•  El reporte adapta decisión, evidencia y lenguaje a audiencia sin ocultar incertidumbre ni exagerar impacto.</a:t>
+            </a:r>
+          </a:p>
+          <a:p>
+            <a:pPr>
+              <a:spcAft>
+                <a:spcPts val="600"/>
+              </a:spcAft>
+            </a:pPr>
+            <a:r>
+              <a:rPr sz="1500">
+                <a:solidFill>
+                  <a:srgbClr val="22282E"/>
+                </a:solidFill>
+              </a:rPr>
+              <a:t>•  Caso razonado. Un ejecutivo necesita exposición y opciones; el anexo conserva comandos y hashes para ingeniería.</a:t>
             </a:r>
           </a:p>
         </p:txBody>
@@ -4301,7 +4827,7 @@
                   <a:srgbClr val="0B3D2E"/>
                 </a:solidFill>
               </a:rPr>
-              <a:t>🧰 Herramientas y preparación</a:t>
+              <a:t>📔 Glosario operativo complementario</a:t>
             </a:r>
           </a:p>
         </p:txBody>
@@ -4339,82 +4865,52 @@
                   <a:srgbClr val="22282E"/>
                 </a:solidFill>
               </a:rPr>
-              <a:t>•  Clase de comunicación; el "entorno" es documental y de plantillas:</a:t>
-            </a:r>
-          </a:p>
-          <a:p>
-            <a:pPr>
-              <a:spcAft>
-                <a:spcPts val="600"/>
-              </a:spcAft>
-            </a:pPr>
-            <a:r>
-              <a:rPr sz="1500">
-                <a:solidFill>
-                  <a:srgbClr val="22282E"/>
-                </a:solidFill>
-              </a:rPr>
-              <a:t>•  Plantillas de informe (procesador de textos o Markdown): estructura fija de portada, resumen ejecutivo, hallazgos, evidencia, recomendaciones, anexos.</a:t>
-            </a:r>
-          </a:p>
-          <a:p>
-            <a:pPr>
-              <a:spcAft>
-                <a:spcPts val="600"/>
-              </a:spcAft>
-            </a:pPr>
-            <a:r>
-              <a:rPr sz="1500">
-                <a:solidFill>
-                  <a:srgbClr val="22282E"/>
-                </a:solidFill>
-              </a:rPr>
-              <a:t>•  Hoja de cálculo / dashboard para métricas (MTTD, MTTR, backlog, cobertura) y su tendencia.</a:t>
-            </a:r>
-          </a:p>
-          <a:p>
-            <a:pPr>
-              <a:spcAft>
-                <a:spcPts val="600"/>
-              </a:spcAft>
-            </a:pPr>
-            <a:r>
-              <a:rPr sz="1500">
-                <a:solidFill>
-                  <a:srgbClr val="22282E"/>
-                </a:solidFill>
-              </a:rPr>
-              <a:t>•  Matriz de escalado / árbol de llamadas (call tree) con roles, no nombres, y canales primario y fuera de banda.</a:t>
-            </a:r>
-          </a:p>
-          <a:p>
-            <a:pPr>
-              <a:spcAft>
-                <a:spcPts val="600"/>
-              </a:spcAft>
-            </a:pPr>
-            <a:r>
-              <a:rPr sz="1500">
-                <a:solidFill>
-                  <a:srgbClr val="22282E"/>
-                </a:solidFill>
-              </a:rPr>
-              <a:t>•  CVSS calculator (FIRST.org) para justificar la severidad de cada hallazgo de forma objetiva.</a:t>
-            </a:r>
-          </a:p>
-          <a:p>
-            <a:pPr>
-              <a:spcAft>
-                <a:spcPts val="600"/>
-              </a:spcAft>
-            </a:pPr>
-            <a:r>
-              <a:rPr sz="1500">
-                <a:solidFill>
-                  <a:srgbClr val="22282E"/>
-                </a:solidFill>
-              </a:rPr>
-              <a:t>•  Registro de comunicaciones del incidente (timeline): hora, emisor, receptor, canal, mensaje —clave para el reporte post-incidente y para legal.</a:t>
+              <a:t>•  Término — Definición</a:t>
+            </a:r>
+          </a:p>
+          <a:p>
+            <a:pPr>
+              <a:spcAft>
+                <a:spcPts val="600"/>
+              </a:spcAft>
+            </a:pPr>
+            <a:r>
+              <a:rPr sz="1500">
+                <a:solidFill>
+                  <a:srgbClr val="22282E"/>
+                </a:solidFill>
+              </a:rPr>
+              <a:t>•  Evidencia — Información cuya procedencia y relación con un criterio pueden revisarse.</a:t>
+            </a:r>
+          </a:p>
+          <a:p>
+            <a:pPr>
+              <a:spcAft>
+                <a:spcPts val="600"/>
+              </a:spcAft>
+            </a:pPr>
+            <a:r>
+              <a:rPr sz="1500">
+                <a:solidFill>
+                  <a:srgbClr val="22282E"/>
+                </a:solidFill>
+              </a:rPr>
+              <a:t>•  Supuesto — Condición declarada de la que depende una conclusión.</a:t>
+            </a:r>
+          </a:p>
+          <a:p>
+            <a:pPr>
+              <a:spcAft>
+                <a:spcPts val="600"/>
+              </a:spcAft>
+            </a:pPr>
+            <a:r>
+              <a:rPr sz="1500">
+                <a:solidFill>
+                  <a:srgbClr val="22282E"/>
+                </a:solidFill>
+              </a:rPr>
+              <a:t>•  Riesgo residual — Exposición que permanece después del tratamiento.</a:t>
             </a:r>
           </a:p>
         </p:txBody>
@@ -4465,7 +4961,7 @@
                   <a:srgbClr val="0B3D2E"/>
                 </a:solidFill>
               </a:rPr>
-              <a:t>🧪 Laboratorio guiado — Redactar el paquete de reporte de un incidente</a:t>
+              <a:t>✅ Criterio de dominio</a:t>
             </a:r>
           </a:p>
         </p:txBody>
@@ -4503,97 +4999,7 @@
                   <a:srgbClr val="22282E"/>
                 </a:solidFill>
               </a:rPr>
-              <a:t>•  Ejercicio aplicado: a partir de un caso, produces el paquete completo de comunicación de un incidente de ransomware contenido.</a:t>
-            </a:r>
-          </a:p>
-          <a:p>
-            <a:pPr>
-              <a:spcAft>
-                <a:spcPts val="600"/>
-              </a:spcAft>
-            </a:pPr>
-            <a:r>
-              <a:rPr sz="1500">
-                <a:solidFill>
-                  <a:srgbClr val="22282E"/>
-                </a:solidFill>
-              </a:rPr>
-              <a:t>•  Toma el caso. Escenario: EDR aísla tres estaciones tras detectar cifrado anómalo; se confirma ransomware en un segmento, sin exfiltración probada, contenido en 4 horas. Datos: activos afectados, hora de detección, hora de contención, acciones tomadas.</a:t>
-            </a:r>
-          </a:p>
-          <a:p>
-            <a:pPr>
-              <a:spcAft>
-                <a:spcPts val="600"/>
-              </a:spcAft>
-            </a:pPr>
-            <a:r>
-              <a:rPr sz="1500">
-                <a:solidFill>
-                  <a:srgbClr val="22282E"/>
-                </a:solidFill>
-              </a:rPr>
-              <a:t>•  Construye la línea de tiempo. Tabla con hora, evento, actor y evidencia (ID de alerta EDR, hash, host). Es la columna vertebral de todo lo demás.</a:t>
-            </a:r>
-          </a:p>
-          <a:p>
-            <a:pPr>
-              <a:spcAft>
-                <a:spcPts val="600"/>
-              </a:spcAft>
-            </a:pPr>
-            <a:r>
-              <a:rPr sz="1500">
-                <a:solidFill>
-                  <a:srgbClr val="22282E"/>
-                </a:solidFill>
-              </a:rPr>
-              <a:t>•  Escribe el informe técnico. Para el equipo: IOCs, hosts, técnica MITRE ATT&amp;CK observada (p. ej. T1486), acciones de contención y erradicación, y recomendaciones concretas (parches, segmentación, backups).</a:t>
-            </a:r>
-          </a:p>
-          <a:p>
-            <a:pPr>
-              <a:spcAft>
-                <a:spcPts val="600"/>
-              </a:spcAft>
-            </a:pPr>
-            <a:r>
-              <a:rPr sz="1500">
-                <a:solidFill>
-                  <a:srgbClr val="22282E"/>
-                </a:solidFill>
-              </a:rPr>
-              <a:t>•  Redacta el resumen ejecutivo (BLUF). Media página, sin jerga: qué ocurrió, impacto en el negocio (tres equipos parados 4 h, sin fuga confirmada), decisiones requeridas (aprobar reinstalación, revisar seguro), estado actual.</a:t>
-            </a:r>
-          </a:p>
-          <a:p>
-            <a:pPr>
-              <a:spcAft>
-                <a:spcPts val="600"/>
-              </a:spcAft>
-            </a:pPr>
-            <a:r>
-              <a:rPr sz="1500">
-                <a:solidFill>
-                  <a:srgbClr val="22282E"/>
-                </a:solidFill>
-              </a:rPr>
-              <a:t>•  Prepara el brief de gestión. Nivel intermedio: riesgo residual, coste estimado de recuperación, SLA de vuelta a operación, y qué recursos se necesitan.</a:t>
-            </a:r>
-          </a:p>
-          <a:p>
-            <a:pPr>
-              <a:spcAft>
-                <a:spcPts val="600"/>
-              </a:spcAft>
-            </a:pPr>
-            <a:r>
-              <a:rPr sz="1500">
-                <a:solidFill>
-                  <a:srgbClr val="22282E"/>
-                </a:solidFill>
-              </a:rPr>
-              <a:t>•  Define el plan de comunicación. Matriz de escalado: quién se entera a los 15 min, a la hora, y al cierre; canal primario y fuera de banda; qué se dice y qué no se dice mientras la investigación sigue abierta.</a:t>
+              <a:t>•  El alumno demuestra dominio cuando explica el diagrama, resuelve el caso con evidencia, declara límites y puede defender por qué su decisión cambia si cambia un supuesto.</a:t>
             </a:r>
           </a:p>
         </p:txBody>
@@ -4644,7 +5050,7 @@
                   <a:srgbClr val="0B3D2E"/>
                 </a:solidFill>
               </a:rPr>
-              <a:t>✍️ Ejercicios</a:t>
+              <a:t>📖 Definiciones y características</a:t>
             </a:r>
           </a:p>
         </p:txBody>
@@ -4682,82 +5088,97 @@
                   <a:srgbClr val="22282E"/>
                 </a:solidFill>
               </a:rPr>
-              <a:t>•  Reescribe un hallazgo técnico ("SMBv1 habilitado en 40 hosts, CVE-2017-0144") en una frase para dirección ejecutiva.</a:t>
-            </a:r>
-          </a:p>
-          <a:p>
-            <a:pPr>
-              <a:spcAft>
-                <a:spcPts val="600"/>
-              </a:spcAft>
-            </a:pPr>
-            <a:r>
-              <a:rPr sz="1500">
-                <a:solidFill>
-                  <a:srgbClr val="22282E"/>
-                </a:solidFill>
-              </a:rPr>
-              <a:t>•  Redacta un resumen ejecutivo (máx. 150 palabras) para el incidente del laboratorio.</a:t>
-            </a:r>
-          </a:p>
-          <a:p>
-            <a:pPr>
-              <a:spcAft>
-                <a:spcPts val="600"/>
-              </a:spcAft>
-            </a:pPr>
-            <a:r>
-              <a:rPr sz="1500">
-                <a:solidFill>
-                  <a:srgbClr val="22282E"/>
-                </a:solidFill>
-              </a:rPr>
-              <a:t>•  Diseña la matriz de escalado de tu organización (roles, canal primario, canal fuera de banda, umbral de tiempo).</a:t>
-            </a:r>
-          </a:p>
-          <a:p>
-            <a:pPr>
-              <a:spcAft>
-                <a:spcPts val="600"/>
-              </a:spcAft>
-            </a:pPr>
-            <a:r>
-              <a:rPr sz="1500">
-                <a:solidFill>
-                  <a:srgbClr val="22282E"/>
-                </a:solidFill>
-              </a:rPr>
-              <a:t>•  Define cinco KPIs de SOC con umbral y frecuencia, y justifica por qué cada uno importa a la dirección.</a:t>
-            </a:r>
-          </a:p>
-          <a:p>
-            <a:pPr>
-              <a:spcAft>
-                <a:spcPts val="600"/>
-              </a:spcAft>
-            </a:pPr>
-            <a:r>
-              <a:rPr sz="1500">
-                <a:solidFill>
-                  <a:srgbClr val="22282E"/>
-                </a:solidFill>
-              </a:rPr>
-              <a:t>•  Construye un árbol de decisión de notificación (interna → clientes → reguladores → fuerzas del orden) con los disparadores de cada rama.</a:t>
-            </a:r>
-          </a:p>
-          <a:p>
-            <a:pPr>
-              <a:spcAft>
-                <a:spcPts val="600"/>
-              </a:spcAft>
-            </a:pPr>
-            <a:r>
-              <a:rPr sz="1500">
-                <a:solidFill>
-                  <a:srgbClr val="22282E"/>
-                </a:solidFill>
-              </a:rPr>
-              <a:t>•  Convierte un informe de vulnerabilidades de 20 hallazgos en un cuadro priorizado de "top 5 a remediar esta semana" con criterio explícito.</a:t>
+              <a:t>•  BLUF (Bottom Line Up Front): técnica de redacción que pone la conclusión y la acción requerida al principio. Característica clave: respeta el tiempo del lector ejecutivo, que decide antes de leer el…</a:t>
+            </a:r>
+          </a:p>
+          <a:p>
+            <a:pPr>
+              <a:spcAft>
+                <a:spcPts val="600"/>
+              </a:spcAft>
+            </a:pPr>
+            <a:r>
+              <a:rPr sz="1500">
+                <a:solidFill>
+                  <a:srgbClr val="22282E"/>
+                </a:solidFill>
+              </a:rPr>
+              <a:t>•  Resumen ejecutivo: media página sin jerga que responde qué pasó, qué impacto tiene en el negocio y qué se pide decidir. Característica clave: se escribe al final pero se lee primero; no contiene…</a:t>
+            </a:r>
+          </a:p>
+          <a:p>
+            <a:pPr>
+              <a:spcAft>
+                <a:spcPts val="600"/>
+              </a:spcAft>
+            </a:pPr>
+            <a:r>
+              <a:rPr sz="1500">
+                <a:solidFill>
+                  <a:srgbClr val="22282E"/>
+                </a:solidFill>
+              </a:rPr>
+              <a:t>•  MTTD / MTTR: Mean Time To Detect (tiempo medio hasta detectar) y Mean Time To Respond/Remediate (hasta responder/remediar). Característica clave: miden la eficacia operativa del SOC y son los KPIs…</a:t>
+            </a:r>
+          </a:p>
+          <a:p>
+            <a:pPr>
+              <a:spcAft>
+                <a:spcPts val="600"/>
+              </a:spcAft>
+            </a:pPr>
+            <a:r>
+              <a:rPr sz="1500">
+                <a:solidFill>
+                  <a:srgbClr val="22282E"/>
+                </a:solidFill>
+              </a:rPr>
+              <a:t>•  KPI vs KRI: un KPI mide desempeño pasado (% de activos escaneados); un KRI anticipa riesgo (nº de sistemas críticos sin parchear &gt; SLA). Característica clave: se reportan juntos para dar foto y…</a:t>
+            </a:r>
+          </a:p>
+          <a:p>
+            <a:pPr>
+              <a:spcAft>
+                <a:spcPts val="600"/>
+              </a:spcAft>
+            </a:pPr>
+            <a:r>
+              <a:rPr sz="1500">
+                <a:solidFill>
+                  <a:srgbClr val="22282E"/>
+                </a:solidFill>
+              </a:rPr>
+              <a:t>•  Stakeholder / audiencia: grupo con interés en el reporte —analistas, dueños de sistema, gestión, dirección, legal, comunicación, reguladores. Característica clave: cada uno necesita distinto nivel de…</a:t>
+            </a:r>
+          </a:p>
+          <a:p>
+            <a:pPr>
+              <a:spcAft>
+                <a:spcPts val="600"/>
+              </a:spcAft>
+            </a:pPr>
+            <a:r>
+              <a:rPr sz="1500">
+                <a:solidFill>
+                  <a:srgbClr val="22282E"/>
+                </a:solidFill>
+              </a:rPr>
+              <a:t>•  Canal fuera de banda (out-of-band): medio de comunicación alterno (teléfono, Signal, sala física) usado durante un incidente por si el atacante controla el correo/chat corporativo. Característica…</a:t>
+            </a:r>
+          </a:p>
+          <a:p>
+            <a:pPr>
+              <a:spcAft>
+                <a:spcPts val="600"/>
+              </a:spcAft>
+            </a:pPr>
+            <a:r>
+              <a:rPr sz="1500">
+                <a:solidFill>
+                  <a:srgbClr val="22282E"/>
+                </a:solidFill>
+              </a:rPr>
+              <a:t>•  Ventana de notificación: plazo legal para notificar una brecha (p. ej. 72 horas a la autoridad bajo GDPR). Característica clave: corre desde que se conoce la brecha, no desde que se resuelve.</a:t>
             </a:r>
           </a:p>
         </p:txBody>
@@ -4808,7 +5229,7 @@
                   <a:srgbClr val="0B3D2E"/>
                 </a:solidFill>
               </a:rPr>
-              <a:t>📝 Reto verificable</a:t>
+              <a:t>🧰 Herramientas y preparación</a:t>
             </a:r>
           </a:p>
         </p:txBody>
@@ -4846,97 +5267,82 @@
                   <a:srgbClr val="22282E"/>
                 </a:solidFill>
               </a:rPr>
-              <a:t>•  Reto: entrega el paquete de comunicación completo del incidente del laboratorio, apto para presentarlo en una reunión de crisis.</a:t>
-            </a:r>
-          </a:p>
-          <a:p>
-            <a:pPr>
-              <a:spcAft>
-                <a:spcPts val="600"/>
-              </a:spcAft>
-            </a:pPr>
-            <a:r>
-              <a:rPr sz="1500">
-                <a:solidFill>
-                  <a:srgbClr val="22282E"/>
-                </a:solidFill>
-              </a:rPr>
-              <a:t>•  Criterio de aceptación:</a:t>
-            </a:r>
-          </a:p>
-          <a:p>
-            <a:pPr>
-              <a:spcAft>
-                <a:spcPts val="600"/>
-              </a:spcAft>
-            </a:pPr>
-            <a:r>
-              <a:rPr sz="1500">
-                <a:solidFill>
-                  <a:srgbClr val="22282E"/>
-                </a:solidFill>
-              </a:rPr>
-              <a:t>•  El resumen ejecutivo ocupa ≤ 1 página, no contiene jerga técnica ni CVE crudos y termina con las decisiones requeridas.</a:t>
-            </a:r>
-          </a:p>
-          <a:p>
-            <a:pPr>
-              <a:spcAft>
-                <a:spcPts val="600"/>
-              </a:spcAft>
-            </a:pPr>
-            <a:r>
-              <a:rPr sz="1500">
-                <a:solidFill>
-                  <a:srgbClr val="22282E"/>
-                </a:solidFill>
-              </a:rPr>
-              <a:t>•  El informe técnico incluye línea de tiempo con evidencia verificable, técnica MITRE ATT&amp;CK y recomendaciones accionables con dueño.</a:t>
-            </a:r>
-          </a:p>
-          <a:p>
-            <a:pPr>
-              <a:spcAft>
-                <a:spcPts val="600"/>
-              </a:spcAft>
-            </a:pPr>
-            <a:r>
-              <a:rPr sz="1500">
-                <a:solidFill>
-                  <a:srgbClr val="22282E"/>
-                </a:solidFill>
-              </a:rPr>
-              <a:t>•  Existe una matriz de escalado con canal fuera de banda y umbrales de tiempo por rol.</a:t>
-            </a:r>
-          </a:p>
-          <a:p>
-            <a:pPr>
-              <a:spcAft>
-                <a:spcPts val="600"/>
-              </a:spcAft>
-            </a:pPr>
-            <a:r>
-              <a:rPr sz="1500">
-                <a:solidFill>
-                  <a:srgbClr val="22282E"/>
-                </a:solidFill>
-              </a:rPr>
-              <a:t>•  La decisión de notificación está documentada con su base legal y marca temporal (aunque la conclusión sea "no aplica").</a:t>
-            </a:r>
-          </a:p>
-          <a:p>
-            <a:pPr>
-              <a:spcAft>
-                <a:spcPts val="600"/>
-              </a:spcAft>
-            </a:pPr>
-            <a:r>
-              <a:rPr sz="1500">
-                <a:solidFill>
-                  <a:srgbClr val="22282E"/>
-                </a:solidFill>
-              </a:rPr>
-              <a:t>•  Se reportan MTTD y MTTR comparados con el objetivo y al menos tres lecciones aprendidas con dueño y fecha.</a:t>
+              <a:t>•  Clase de comunicación; el "entorno" es documental y de plantillas:</a:t>
+            </a:r>
+          </a:p>
+          <a:p>
+            <a:pPr>
+              <a:spcAft>
+                <a:spcPts val="600"/>
+              </a:spcAft>
+            </a:pPr>
+            <a:r>
+              <a:rPr sz="1500">
+                <a:solidFill>
+                  <a:srgbClr val="22282E"/>
+                </a:solidFill>
+              </a:rPr>
+              <a:t>•  Plantillas de informe (procesador de textos o Markdown): estructura fija de portada, resumen ejecutivo, hallazgos, evidencia, recomendaciones, anexos.</a:t>
+            </a:r>
+          </a:p>
+          <a:p>
+            <a:pPr>
+              <a:spcAft>
+                <a:spcPts val="600"/>
+              </a:spcAft>
+            </a:pPr>
+            <a:r>
+              <a:rPr sz="1500">
+                <a:solidFill>
+                  <a:srgbClr val="22282E"/>
+                </a:solidFill>
+              </a:rPr>
+              <a:t>•  Hoja de cálculo / dashboard para métricas (MTTD, MTTR, backlog, cobertura) y su tendencia.</a:t>
+            </a:r>
+          </a:p>
+          <a:p>
+            <a:pPr>
+              <a:spcAft>
+                <a:spcPts val="600"/>
+              </a:spcAft>
+            </a:pPr>
+            <a:r>
+              <a:rPr sz="1500">
+                <a:solidFill>
+                  <a:srgbClr val="22282E"/>
+                </a:solidFill>
+              </a:rPr>
+              <a:t>•  Matriz de escalado / árbol de llamadas (call tree) con roles, no nombres, y canales primario y fuera de banda.</a:t>
+            </a:r>
+          </a:p>
+          <a:p>
+            <a:pPr>
+              <a:spcAft>
+                <a:spcPts val="600"/>
+              </a:spcAft>
+            </a:pPr>
+            <a:r>
+              <a:rPr sz="1500">
+                <a:solidFill>
+                  <a:srgbClr val="22282E"/>
+                </a:solidFill>
+              </a:rPr>
+              <a:t>•  CVSS calculator (FIRST.org) para justificar la severidad de cada hallazgo de forma objetiva.</a:t>
+            </a:r>
+          </a:p>
+          <a:p>
+            <a:pPr>
+              <a:spcAft>
+                <a:spcPts val="600"/>
+              </a:spcAft>
+            </a:pPr>
+            <a:r>
+              <a:rPr sz="1500">
+                <a:solidFill>
+                  <a:srgbClr val="22282E"/>
+                </a:solidFill>
+              </a:rPr>
+              <a:t>•  Registro de comunicaciones del incidente (timeline): hora, emisor, receptor, canal, mensaje —clave para el reporte post-incidente y para legal.</a:t>
             </a:r>
           </a:p>
         </p:txBody>
